--- a/dist/초2/정보·AI/디지털생활/초2_정보·AI_디지털생활_01_온라인예절_학생용.pptx
+++ b/dist/초2/정보·AI/디지털생활/초2_정보·AI_디지털생활_01_온라인예절_학생용.pptx
@@ -119,13 +119,13 @@
   <p:extLst>
     <p:ext uri="{521415D9-36F7-43E2-AB2F-B90AF26B5E84}">
       <p14:sectionLst xmlns:p14="http://schemas.microsoft.com/office/powerpoint/2010/main">
-        <p14:section name="도입" id="{b6c557a8-3234-1d1a-b520-56103b23bf5d}">
+        <p14:section name="도입" id="{393684ae-a265-4ee5-3cf5-60eef8d81d8c}">
           <p14:sldIdLst>
             <p14:sldId id="256"/>
             <p14:sldId id="257"/>
           </p14:sldIdLst>
         </p14:section>
-        <p14:section name="개념" id="{67019e8b-be87-aaf9-a3a5-f9d113ad8805}">
+        <p14:section name="개념" id="{dfaab03a-48f1-92ad-f980-e181397b8e4e}">
           <p14:sldIdLst>
             <p14:sldId id="258"/>
             <p14:sldId id="260"/>
@@ -133,37 +133,37 @@
             <p14:sldId id="263"/>
           </p14:sldIdLst>
         </p14:section>
-        <p14:section name="연습" id="{098f9ea1-a5d9-f8b5-9569-e3853d9ad139}">
+        <p14:section name="연습" id="{2147a7d1-f3a4-5371-3e39-1472985e52d8}">
           <p14:sldIdLst>
             <p14:sldId id="259"/>
             <p14:sldId id="262"/>
             <p14:sldId id="264"/>
           </p14:sldIdLst>
         </p14:section>
-        <p14:section name="개념" id="{40ef3569-ca07-b7ee-9461-db75a6444ad4}">
+        <p14:section name="개념" id="{0e4afcd6-c2f3-df8e-d416-a2724d8e9fc6}">
           <p14:sldIdLst/>
         </p14:section>
-        <p14:section name="연습" id="{aebf6049-c0d4-b07a-69a4-7fde1ec89205}">
+        <p14:section name="연습" id="{d569e0e2-4212-bf2a-d765-932f2c35c8d9}">
           <p14:sldIdLst/>
         </p14:section>
-        <p14:section name="개념" id="{e831cdbb-5a32-af90-43e6-38aa8bdf7258}">
+        <p14:section name="개념" id="{ece4ac94-4fd5-01da-61d0-d81e72daa0b4}">
           <p14:sldIdLst/>
         </p14:section>
-        <p14:section name="연습" id="{4bc7b995-9525-4183-cda0-ba9439f6a364}">
+        <p14:section name="연습" id="{1bd7280d-4067-1a7f-2806-15664a82345e}">
           <p14:sldIdLst/>
         </p14:section>
-        <p14:section name="확인" id="{5a6bb08d-0372-2c0f-d5f9-b1cf154aecd0}">
+        <p14:section name="확인" id="{e5d9f320-63ae-5087-ed26-3388c8585687}">
           <p14:sldIdLst>
             <p14:sldId id="265"/>
             <p14:sldId id="266"/>
           </p14:sldIdLst>
         </p14:section>
-        <p14:section name="정리" id="{5d7a78f4-1c18-b80c-270c-213274059093}">
+        <p14:section name="정리" id="{4358023e-5601-cdd2-4ecd-8f40a1d5c9c8}">
           <p14:sldIdLst>
             <p14:sldId id="267"/>
           </p14:sldIdLst>
         </p14:section>
-        <p14:section name="보충" id="{162c44d6-f9d0-2479-5ab8-19bbfd33a411}">
+        <p14:section name="보충" id="{ab956919-9344-265c-721a-251c31987dff}">
           <p14:sldIdLst>
             <p14:sldId id="268"/>
           </p14:sldIdLst>
